--- a/docs/grafana_presentation.pptx
+++ b/docs/grafana_presentation.pptx
@@ -218,7 +218,7 @@
           <a:p>
             <a:fld id="{8CF94B62-D624-4A11-A8F7-8677B0A772DA}" type="datetimeFigureOut">
               <a:rPr lang="en-US" smtClean="0"/>
-              <a:t>10/15/2025</a:t>
+              <a:t>10/21/2025</a:t>
             </a:fld>
             <a:endParaRPr lang="en-US"/>
           </a:p>
@@ -6926,7 +6926,7 @@
           <a:p>
             <a:fld id="{5BCAD085-E8A6-8845-BD4E-CB4CCA059FC4}" type="datetimeFigureOut">
               <a:rPr lang="en-US" smtClean="0"/>
-              <a:t>10/15/2025</a:t>
+              <a:t>10/21/2025</a:t>
             </a:fld>
             <a:endParaRPr lang="en-US"/>
           </a:p>
@@ -7201,7 +7201,7 @@
           <a:p>
             <a:fld id="{5BCAD085-E8A6-8845-BD4E-CB4CCA059FC4}" type="datetimeFigureOut">
               <a:rPr lang="en-US" smtClean="0"/>
-              <a:t>10/15/2025</a:t>
+              <a:t>10/21/2025</a:t>
             </a:fld>
             <a:endParaRPr lang="en-US"/>
           </a:p>
@@ -7395,7 +7395,7 @@
           <a:p>
             <a:fld id="{5BCAD085-E8A6-8845-BD4E-CB4CCA059FC4}" type="datetimeFigureOut">
               <a:rPr lang="en-US" smtClean="0"/>
-              <a:t>10/15/2025</a:t>
+              <a:t>10/21/2025</a:t>
             </a:fld>
             <a:endParaRPr lang="en-US"/>
           </a:p>
@@ -7668,7 +7668,7 @@
           <a:p>
             <a:fld id="{5BCAD085-E8A6-8845-BD4E-CB4CCA059FC4}" type="datetimeFigureOut">
               <a:rPr lang="en-US" smtClean="0"/>
-              <a:t>10/15/2025</a:t>
+              <a:t>10/21/2025</a:t>
             </a:fld>
             <a:endParaRPr lang="en-US"/>
           </a:p>
@@ -8009,7 +8009,7 @@
           <a:p>
             <a:fld id="{5BCAD085-E8A6-8845-BD4E-CB4CCA059FC4}" type="datetimeFigureOut">
               <a:rPr lang="en-US" smtClean="0"/>
-              <a:t>10/15/2025</a:t>
+              <a:t>10/21/2025</a:t>
             </a:fld>
             <a:endParaRPr lang="en-US"/>
           </a:p>
@@ -8632,7 +8632,7 @@
           <a:p>
             <a:fld id="{5BCAD085-E8A6-8845-BD4E-CB4CCA059FC4}" type="datetimeFigureOut">
               <a:rPr lang="en-US" smtClean="0"/>
-              <a:t>10/15/2025</a:t>
+              <a:t>10/21/2025</a:t>
             </a:fld>
             <a:endParaRPr lang="en-US"/>
           </a:p>
@@ -9492,7 +9492,7 @@
           <a:p>
             <a:fld id="{5BCAD085-E8A6-8845-BD4E-CB4CCA059FC4}" type="datetimeFigureOut">
               <a:rPr lang="en-US" smtClean="0"/>
-              <a:t>10/15/2025</a:t>
+              <a:t>10/21/2025</a:t>
             </a:fld>
             <a:endParaRPr lang="en-US"/>
           </a:p>
@@ -9662,7 +9662,7 @@
           <a:p>
             <a:fld id="{5BCAD085-E8A6-8845-BD4E-CB4CCA059FC4}" type="datetimeFigureOut">
               <a:rPr lang="en-US" smtClean="0"/>
-              <a:t>10/15/2025</a:t>
+              <a:t>10/21/2025</a:t>
             </a:fld>
             <a:endParaRPr lang="en-US"/>
           </a:p>
@@ -9842,7 +9842,7 @@
           <a:p>
             <a:fld id="{5BCAD085-E8A6-8845-BD4E-CB4CCA059FC4}" type="datetimeFigureOut">
               <a:rPr lang="en-US" smtClean="0"/>
-              <a:t>10/15/2025</a:t>
+              <a:t>10/21/2025</a:t>
             </a:fld>
             <a:endParaRPr lang="en-US"/>
           </a:p>
@@ -10058,7 +10058,7 @@
           <a:p>
             <a:fld id="{5BCAD085-E8A6-8845-BD4E-CB4CCA059FC4}" type="datetimeFigureOut">
               <a:rPr lang="en-US" smtClean="0"/>
-              <a:t>10/15/2025</a:t>
+              <a:t>10/21/2025</a:t>
             </a:fld>
             <a:endParaRPr lang="en-US"/>
           </a:p>
@@ -10304,7 +10304,7 @@
           <a:p>
             <a:fld id="{5BCAD085-E8A6-8845-BD4E-CB4CCA059FC4}" type="datetimeFigureOut">
               <a:rPr lang="en-US" smtClean="0"/>
-              <a:t>10/15/2025</a:t>
+              <a:t>10/21/2025</a:t>
             </a:fld>
             <a:endParaRPr lang="en-US"/>
           </a:p>
@@ -10596,7 +10596,7 @@
           <a:p>
             <a:fld id="{5BCAD085-E8A6-8845-BD4E-CB4CCA059FC4}" type="datetimeFigureOut">
               <a:rPr lang="en-US" smtClean="0"/>
-              <a:t>10/15/2025</a:t>
+              <a:t>10/21/2025</a:t>
             </a:fld>
             <a:endParaRPr lang="en-US"/>
           </a:p>
@@ -11040,7 +11040,7 @@
           <a:p>
             <a:fld id="{5BCAD085-E8A6-8845-BD4E-CB4CCA059FC4}" type="datetimeFigureOut">
               <a:rPr lang="en-US" smtClean="0"/>
-              <a:t>10/15/2025</a:t>
+              <a:t>10/21/2025</a:t>
             </a:fld>
             <a:endParaRPr lang="en-US"/>
           </a:p>
@@ -11158,7 +11158,7 @@
           <a:p>
             <a:fld id="{5BCAD085-E8A6-8845-BD4E-CB4CCA059FC4}" type="datetimeFigureOut">
               <a:rPr lang="en-US" smtClean="0"/>
-              <a:t>10/15/2025</a:t>
+              <a:t>10/21/2025</a:t>
             </a:fld>
             <a:endParaRPr lang="en-US"/>
           </a:p>
@@ -11253,7 +11253,7 @@
           <a:p>
             <a:fld id="{5BCAD085-E8A6-8845-BD4E-CB4CCA059FC4}" type="datetimeFigureOut">
               <a:rPr lang="en-US" smtClean="0"/>
-              <a:t>10/15/2025</a:t>
+              <a:t>10/21/2025</a:t>
             </a:fld>
             <a:endParaRPr lang="en-US"/>
           </a:p>
@@ -11532,7 +11532,7 @@
           <a:p>
             <a:fld id="{5BCAD085-E8A6-8845-BD4E-CB4CCA059FC4}" type="datetimeFigureOut">
               <a:rPr lang="en-US" smtClean="0"/>
-              <a:t>10/15/2025</a:t>
+              <a:t>10/21/2025</a:t>
             </a:fld>
             <a:endParaRPr lang="en-US"/>
           </a:p>
@@ -11807,7 +11807,7 @@
           <a:p>
             <a:fld id="{5BCAD085-E8A6-8845-BD4E-CB4CCA059FC4}" type="datetimeFigureOut">
               <a:rPr lang="en-US" smtClean="0"/>
-              <a:t>10/15/2025</a:t>
+              <a:t>10/21/2025</a:t>
             </a:fld>
             <a:endParaRPr lang="en-US"/>
           </a:p>
@@ -12372,7 +12372,7 @@
           <a:p>
             <a:fld id="{5BCAD085-E8A6-8845-BD4E-CB4CCA059FC4}" type="datetimeFigureOut">
               <a:rPr lang="en-US" smtClean="0"/>
-              <a:t>10/15/2025</a:t>
+              <a:t>10/21/2025</a:t>
             </a:fld>
             <a:endParaRPr lang="en-US"/>
           </a:p>
@@ -13400,11 +13400,11 @@
             <a:pPr algn="r" rtl="1"/>
             <a:r>
               <a:rPr lang="fa-IR" dirty="0"/>
-              <a:t>مقدمه و جایگاه </a:t>
-            </a:r>
-            <a:r>
-              <a:rPr lang="en-US" dirty="0"/>
-              <a:t>Grafana</a:t>
+              <a:t>آشنایی با </a:t>
+            </a:r>
+            <a:r>
+              <a:rPr lang="fa-IR" dirty="0" err="1"/>
+              <a:t>گرافانا</a:t>
             </a:r>
             <a:endParaRPr dirty="0"/>
           </a:p>
@@ -13412,7 +13412,11 @@
             <a:pPr algn="r" rtl="1"/>
             <a:r>
               <a:rPr lang="fa-IR" dirty="0"/>
-              <a:t>معماری و اجزای اصلی</a:t>
+              <a:t>کاربردهای </a:t>
+            </a:r>
+            <a:r>
+              <a:rPr lang="fa-IR" dirty="0" err="1"/>
+              <a:t>گرافانا</a:t>
             </a:r>
             <a:endParaRPr dirty="0"/>
           </a:p>
@@ -13429,14 +13433,6 @@
           </a:p>
           <a:p>
             <a:pPr algn="r" rtl="1"/>
-            <a:r>
-              <a:rPr lang="fa-IR" dirty="0" err="1"/>
-              <a:t>راه‌اندازی</a:t>
-            </a:r>
-            <a:r>
-              <a:rPr lang="fa-IR" dirty="0"/>
-              <a:t> و </a:t>
-            </a:r>
             <a:r>
               <a:rPr lang="fa-IR" dirty="0" err="1"/>
               <a:t>دمو</a:t>
